--- a/examples/ppt/charts/charts-waterfall.pptx
+++ b/examples/ppt/charts/charts-waterfall.pptx
@@ -5,14 +5,14 @@
     <p:sldMasterId xmlns:r="http://schemas.openxmlformats.org/officeDocument/2006/relationships" id="2147483648" r:id="rId1"/>
   </p:sldMasterIdLst>
   <p:sldIdLst>
-    <p:sldId id="256" r:id="Rbc5df66fde744ee4"/>
-    <p:sldId id="257" r:id="Rf18931083a7c44bb"/>
-    <p:sldId id="258" r:id="R4ea6c8e4655b42af"/>
-    <p:sldId id="259" r:id="R02441b29bb474671"/>
-    <p:sldId id="260" r:id="Rff102e72548d4bee"/>
-    <p:sldId id="261" r:id="R3beba8800a26483c"/>
-    <p:sldId id="262" r:id="R97661fd8353f405d"/>
-    <p:sldId id="263" r:id="R62b5db48ddb44535"/>
+    <p:sldId id="256" r:id="Raf214da9ea964845"/>
+    <p:sldId id="257" r:id="R52f11aaacd0d44b4"/>
+    <p:sldId id="258" r:id="R7bbe4e608e2e4ae4"/>
+    <p:sldId id="259" r:id="Rcb3e618f89fb45bb"/>
+    <p:sldId id="260" r:id="R7c50181587ff4b5c"/>
+    <p:sldId id="261" r:id="R7a3de17a254341ff"/>
+    <p:sldId id="262" r:id="R06ece3b5c3714a4d"/>
+    <p:sldId id="263" r:id="R1b6b1e794e344830"/>
   </p:sldIdLst>
   <p:sldSz cx="12192000" cy="6858000"/>
   <p:notesSz cx="6858000" cy="9144000"/>
@@ -287,7 +287,7 @@
 </file>
 
 <file path=ppt/slideMasters/slideMaster1.xml><?xml version="1.0" encoding="utf-8"?>
-<p:sldMaster xmlns:p="http://schemas.openxmlformats.org/presentationml/2006/main">
+<p:sldMaster xmlns:r="http://schemas.openxmlformats.org/officeDocument/2006/relationships" xmlns:p="http://schemas.openxmlformats.org/presentationml/2006/main">
   <p:cSld>
     <p:spTree>
       <p:nvGrpSpPr>
@@ -1586,10 +1586,12 @@
             <a:lstStyle xmlns:a="http://schemas.openxmlformats.org/drawingml/2006/main"/>
             <a:p xmlns:a="http://schemas.openxmlformats.org/drawingml/2006/main">
               <a:pPr>
-                <a:defRPr sz="1000" b="0">
+                <a:defRPr sz="1000">
                   <a:solidFill>
                     <a:srgbClr val="333333"/>
                   </a:solidFill>
+                  <a:latin typeface="Calibri"/>
+                  <a:ea typeface="Calibri"/>
                 </a:defRPr>
               </a:pPr>
             </a:p>
@@ -5235,10 +5237,12 @@
             <a:lstStyle xmlns:a="http://schemas.openxmlformats.org/drawingml/2006/main"/>
             <a:p xmlns:a="http://schemas.openxmlformats.org/drawingml/2006/main">
               <a:pPr>
-                <a:defRPr sz="1100" b="0">
+                <a:defRPr sz="1100">
                   <a:solidFill>
                     <a:srgbClr val="333333"/>
                   </a:solidFill>
+                  <a:latin typeface="Helvetica"/>
+                  <a:ea typeface="Helvetica"/>
                 </a:defRPr>
               </a:pPr>
             </a:p>
@@ -5636,6 +5640,10 @@
     </c:plotArea>
     <c:legend>
       <c:legendPos val="b"/>
+      <c:legendEntry>
+        <c:idx val="0"/>
+        <c:delete val="1"/>
+      </c:legendEntry>
       <c:overlay val="0"/>
       <c:txPr>
         <a:bodyPr xmlns:a="http://schemas.openxmlformats.org/drawingml/2006/main"/>
@@ -5970,6 +5978,10 @@
     </c:plotArea>
     <c:legend>
       <c:legendPos val="b"/>
+      <c:legendEntry>
+        <c:idx val="0"/>
+        <c:delete val="1"/>
+      </c:legendEntry>
       <c:overlay val="0"/>
       <c:txPr>
         <a:bodyPr xmlns:a="http://schemas.openxmlformats.org/drawingml/2006/main"/>
@@ -6314,6 +6326,10 @@
     </c:plotArea>
     <c:legend>
       <c:legendPos val="r"/>
+      <c:legendEntry>
+        <c:idx val="0"/>
+        <c:delete val="1"/>
+      </c:legendEntry>
       <c:overlay val="0"/>
       <c:txPr>
         <a:bodyPr xmlns:a="http://schemas.openxmlformats.org/drawingml/2006/main"/>
@@ -6628,6 +6644,10 @@
     </c:plotArea>
     <c:legend>
       <c:legendPos val="b"/>
+      <c:legendEntry>
+        <c:idx val="0"/>
+        <c:delete val="1"/>
+      </c:legendEntry>
       <c:overlay val="0"/>
       <c:txPr>
         <a:bodyPr xmlns:a="http://schemas.openxmlformats.org/drawingml/2006/main"/>
@@ -8543,8 +8563,8 @@
       <p:grpSpPr/>
       <p:sp>
         <p:nvSpPr>
-          <p:cNvPr id="10000" name="TextBox 1"/>
-          <p:cNvSpPr/>
+          <p:cNvPr id="100000" name="TextBox 1"/>
+          <p:cNvSpPr txBox="1"/>
           <p:nvPr/>
         </p:nvSpPr>
         <p:spPr>
@@ -8571,7 +8591,7 @@
       </p:sp>
       <p:graphicFrame>
         <p:nvGraphicFramePr>
-          <p:cNvPr id="10001" name="Default colors"/>
+          <p:cNvPr id="100001" name="Default colors"/>
           <p:cNvGraphicFramePr/>
           <p:nvPr/>
         </p:nvGraphicFramePr>
@@ -8581,13 +8601,13 @@
         </p:xfrm>
         <a:graphic xmlns:a="http://schemas.openxmlformats.org/drawingml/2006/main">
           <a:graphicData uri="http://schemas.openxmlformats.org/drawingml/2006/chart">
-            <c:chart xmlns:r="http://schemas.openxmlformats.org/officeDocument/2006/relationships" xmlns:c="http://schemas.openxmlformats.org/drawingml/2006/chart" r:id="R6581a31e2e5c4ba1"/>
+            <c:chart xmlns:r="http://schemas.openxmlformats.org/officeDocument/2006/relationships" xmlns:c="http://schemas.openxmlformats.org/drawingml/2006/chart" r:id="Ra5a6de1f09ff4d44"/>
           </a:graphicData>
         </a:graphic>
       </p:graphicFrame>
       <p:graphicFrame>
         <p:nvGraphicFramePr>
-          <p:cNvPr id="10002" name="Default + dataTable"/>
+          <p:cNvPr id="100002" name="Default + dataTable"/>
           <p:cNvGraphicFramePr/>
           <p:nvPr/>
         </p:nvGraphicFramePr>
@@ -8597,13 +8617,13 @@
         </p:xfrm>
         <a:graphic xmlns:a="http://schemas.openxmlformats.org/drawingml/2006/main">
           <a:graphicData uri="http://schemas.openxmlformats.org/drawingml/2006/chart">
-            <c:chart xmlns:r="http://schemas.openxmlformats.org/officeDocument/2006/relationships" xmlns:c="http://schemas.openxmlformats.org/drawingml/2006/chart" r:id="R939a9459b5134363"/>
+            <c:chart xmlns:r="http://schemas.openxmlformats.org/officeDocument/2006/relationships" xmlns:c="http://schemas.openxmlformats.org/drawingml/2006/chart" r:id="R031f85766bf14867"/>
           </a:graphicData>
         </a:graphic>
       </p:graphicFrame>
       <p:graphicFrame>
         <p:nvGraphicFramePr>
-          <p:cNvPr id="10003" name="With legend"/>
+          <p:cNvPr id="100003" name="With legend"/>
           <p:cNvGraphicFramePr/>
           <p:nvPr/>
         </p:nvGraphicFramePr>
@@ -8613,13 +8633,13 @@
         </p:xfrm>
         <a:graphic xmlns:a="http://schemas.openxmlformats.org/drawingml/2006/main">
           <a:graphicData uri="http://schemas.openxmlformats.org/drawingml/2006/chart">
-            <c:chart xmlns:r="http://schemas.openxmlformats.org/officeDocument/2006/relationships" xmlns:c="http://schemas.openxmlformats.org/drawingml/2006/chart" r:id="Rb7b31e18933045bb"/>
+            <c:chart xmlns:r="http://schemas.openxmlformats.org/officeDocument/2006/relationships" xmlns:c="http://schemas.openxmlformats.org/drawingml/2006/chart" r:id="R085ba2ae247d401b"/>
           </a:graphicData>
         </a:graphic>
       </p:graphicFrame>
       <p:graphicFrame>
         <p:nvGraphicFramePr>
-          <p:cNvPr id="10004" name="7-step P&amp;L"/>
+          <p:cNvPr id="100004" name="7-step P&amp;L"/>
           <p:cNvGraphicFramePr/>
           <p:nvPr/>
         </p:nvGraphicFramePr>
@@ -8629,7 +8649,7 @@
         </p:xfrm>
         <a:graphic xmlns:a="http://schemas.openxmlformats.org/drawingml/2006/main">
           <a:graphicData uri="http://schemas.openxmlformats.org/drawingml/2006/chart">
-            <c:chart xmlns:r="http://schemas.openxmlformats.org/officeDocument/2006/relationships" xmlns:c="http://schemas.openxmlformats.org/drawingml/2006/chart" r:id="R24fd2516977e45c9"/>
+            <c:chart xmlns:r="http://schemas.openxmlformats.org/officeDocument/2006/relationships" xmlns:c="http://schemas.openxmlformats.org/drawingml/2006/chart" r:id="R6f518f00e2584cf8"/>
           </a:graphicData>
         </a:graphic>
       </p:graphicFrame>
@@ -8650,8 +8670,8 @@
       <p:grpSpPr/>
       <p:sp>
         <p:nvSpPr>
-          <p:cNvPr id="10005" name="TextBox 1"/>
-          <p:cNvSpPr/>
+          <p:cNvPr id="100005" name="TextBox 1"/>
+          <p:cNvSpPr txBox="1"/>
           <p:nvPr/>
         </p:nvSpPr>
         <p:spPr>
@@ -8678,7 +8698,7 @@
       </p:sp>
       <p:graphicFrame>
         <p:nvGraphicFramePr>
-          <p:cNvPr id="10006" name="green/red/blue (default-ish)"/>
+          <p:cNvPr id="100006" name="green/red/blue (default-ish)"/>
           <p:cNvGraphicFramePr/>
           <p:nvPr/>
         </p:nvGraphicFramePr>
@@ -8688,13 +8708,13 @@
         </p:xfrm>
         <a:graphic xmlns:a="http://schemas.openxmlformats.org/drawingml/2006/main">
           <a:graphicData uri="http://schemas.openxmlformats.org/drawingml/2006/chart">
-            <c:chart xmlns:r="http://schemas.openxmlformats.org/officeDocument/2006/relationships" xmlns:c="http://schemas.openxmlformats.org/drawingml/2006/chart" r:id="R16a7c4cf4a6e4ec2"/>
+            <c:chart xmlns:r="http://schemas.openxmlformats.org/officeDocument/2006/relationships" xmlns:c="http://schemas.openxmlformats.org/drawingml/2006/chart" r:id="R8da7d2a85e5342ce"/>
           </a:graphicData>
         </a:graphic>
       </p:graphicFrame>
       <p:graphicFrame>
         <p:nvGraphicFramePr>
-          <p:cNvPr id="10007" name="corporate (teal/orange/navy)"/>
+          <p:cNvPr id="100007" name="corporate (teal/orange/navy)"/>
           <p:cNvGraphicFramePr/>
           <p:nvPr/>
         </p:nvGraphicFramePr>
@@ -8704,13 +8724,13 @@
         </p:xfrm>
         <a:graphic xmlns:a="http://schemas.openxmlformats.org/drawingml/2006/main">
           <a:graphicData uri="http://schemas.openxmlformats.org/drawingml/2006/chart">
-            <c:chart xmlns:r="http://schemas.openxmlformats.org/officeDocument/2006/relationships" xmlns:c="http://schemas.openxmlformats.org/drawingml/2006/chart" r:id="R19bba1c1f38e43e8"/>
+            <c:chart xmlns:r="http://schemas.openxmlformats.org/officeDocument/2006/relationships" xmlns:c="http://schemas.openxmlformats.org/drawingml/2006/chart" r:id="R047e7c3060fa43fe"/>
           </a:graphicData>
         </a:graphic>
       </p:graphicFrame>
       <p:graphicFrame>
         <p:nvGraphicFramePr>
-          <p:cNvPr id="10008" name="monochrome"/>
+          <p:cNvPr id="100008" name="monochrome"/>
           <p:cNvGraphicFramePr/>
           <p:nvPr/>
         </p:nvGraphicFramePr>
@@ -8720,13 +8740,13 @@
         </p:xfrm>
         <a:graphic xmlns:a="http://schemas.openxmlformats.org/drawingml/2006/main">
           <a:graphicData uri="http://schemas.openxmlformats.org/drawingml/2006/chart">
-            <c:chart xmlns:r="http://schemas.openxmlformats.org/officeDocument/2006/relationships" xmlns:c="http://schemas.openxmlformats.org/drawingml/2006/chart" r:id="Rd55415f9bc724edf"/>
+            <c:chart xmlns:r="http://schemas.openxmlformats.org/officeDocument/2006/relationships" xmlns:c="http://schemas.openxmlformats.org/drawingml/2006/chart" r:id="Reea0af559c174f7a"/>
           </a:graphicData>
         </a:graphic>
       </p:graphicFrame>
       <p:graphicFrame>
         <p:nvGraphicFramePr>
-          <p:cNvPr id="10009" name="vivid"/>
+          <p:cNvPr id="100009" name="vivid"/>
           <p:cNvGraphicFramePr/>
           <p:nvPr/>
         </p:nvGraphicFramePr>
@@ -8736,7 +8756,7 @@
         </p:xfrm>
         <a:graphic xmlns:a="http://schemas.openxmlformats.org/drawingml/2006/main">
           <a:graphicData uri="http://schemas.openxmlformats.org/drawingml/2006/chart">
-            <c:chart xmlns:r="http://schemas.openxmlformats.org/officeDocument/2006/relationships" xmlns:c="http://schemas.openxmlformats.org/drawingml/2006/chart" r:id="R1359de7cbeb04220"/>
+            <c:chart xmlns:r="http://schemas.openxmlformats.org/officeDocument/2006/relationships" xmlns:c="http://schemas.openxmlformats.org/drawingml/2006/chart" r:id="R4f8b30b08e3f463a"/>
           </a:graphicData>
         </a:graphic>
       </p:graphicFrame>
@@ -8757,8 +8777,8 @@
       <p:grpSpPr/>
       <p:sp>
         <p:nvSpPr>
-          <p:cNvPr id="10010" name="TextBox 1"/>
-          <p:cNvSpPr/>
+          <p:cNvPr id="100010" name="TextBox 1"/>
+          <p:cNvSpPr txBox="1"/>
           <p:nvPr/>
         </p:nvSpPr>
         <p:spPr>
@@ -8785,7 +8805,7 @@
       </p:sp>
       <p:graphicFrame>
         <p:nvGraphicFramePr>
-          <p:cNvPr id="10011" name="Styled title"/>
+          <p:cNvPr id="100011" name="Styled title"/>
           <p:cNvGraphicFramePr/>
           <p:nvPr/>
         </p:nvGraphicFramePr>
@@ -8795,13 +8815,13 @@
         </p:xfrm>
         <a:graphic xmlns:a="http://schemas.openxmlformats.org/drawingml/2006/main">
           <a:graphicData uri="http://schemas.openxmlformats.org/drawingml/2006/chart">
-            <c:chart xmlns:r="http://schemas.openxmlformats.org/officeDocument/2006/relationships" xmlns:c="http://schemas.openxmlformats.org/drawingml/2006/chart" r:id="R28404c84bbb44d97"/>
+            <c:chart xmlns:r="http://schemas.openxmlformats.org/officeDocument/2006/relationships" xmlns:c="http://schemas.openxmlformats.org/drawingml/2006/chart" r:id="R84fe33314fb64308"/>
           </a:graphicData>
         </a:graphic>
       </p:graphicFrame>
       <p:graphicFrame>
         <p:nvGraphicFramePr>
-          <p:cNvPr id="10012" name="legend=top + legendFont"/>
+          <p:cNvPr id="100012" name="legend=top + legendFont"/>
           <p:cNvGraphicFramePr/>
           <p:nvPr/>
         </p:nvGraphicFramePr>
@@ -8811,13 +8831,13 @@
         </p:xfrm>
         <a:graphic xmlns:a="http://schemas.openxmlformats.org/drawingml/2006/main">
           <a:graphicData uri="http://schemas.openxmlformats.org/drawingml/2006/chart">
-            <c:chart xmlns:r="http://schemas.openxmlformats.org/officeDocument/2006/relationships" xmlns:c="http://schemas.openxmlformats.org/drawingml/2006/chart" r:id="R963f771ece5f4cd9"/>
+            <c:chart xmlns:r="http://schemas.openxmlformats.org/officeDocument/2006/relationships" xmlns:c="http://schemas.openxmlformats.org/drawingml/2006/chart" r:id="R433332334bde4007"/>
           </a:graphicData>
         </a:graphic>
       </p:graphicFrame>
       <p:graphicFrame>
         <p:nvGraphicFramePr>
-          <p:cNvPr id="10013" name="legend.overlay=true"/>
+          <p:cNvPr id="100013" name="legend.overlay=true"/>
           <p:cNvGraphicFramePr/>
           <p:nvPr/>
         </p:nvGraphicFramePr>
@@ -8827,13 +8847,13 @@
         </p:xfrm>
         <a:graphic xmlns:a="http://schemas.openxmlformats.org/drawingml/2006/main">
           <a:graphicData uri="http://schemas.openxmlformats.org/drawingml/2006/chart">
-            <c:chart xmlns:r="http://schemas.openxmlformats.org/officeDocument/2006/relationships" xmlns:c="http://schemas.openxmlformats.org/drawingml/2006/chart" r:id="R2598ea9134bb4273"/>
+            <c:chart xmlns:r="http://schemas.openxmlformats.org/officeDocument/2006/relationships" xmlns:c="http://schemas.openxmlformats.org/drawingml/2006/chart" r:id="R5386b76154d64dc9"/>
           </a:graphicData>
         </a:graphic>
       </p:graphicFrame>
       <p:graphicFrame>
         <p:nvGraphicFramePr>
-          <p:cNvPr id="10014" name="Chart 4"/>
+          <p:cNvPr id="100014" name="Chart 4"/>
           <p:cNvGraphicFramePr/>
           <p:nvPr/>
         </p:nvGraphicFramePr>
@@ -8843,7 +8863,7 @@
         </p:xfrm>
         <a:graphic xmlns:a="http://schemas.openxmlformats.org/drawingml/2006/main">
           <a:graphicData uri="http://schemas.openxmlformats.org/drawingml/2006/chart">
-            <c:chart xmlns:r="http://schemas.openxmlformats.org/officeDocument/2006/relationships" xmlns:c="http://schemas.openxmlformats.org/drawingml/2006/chart" r:id="Recd93f955dc942b3"/>
+            <c:chart xmlns:r="http://schemas.openxmlformats.org/officeDocument/2006/relationships" xmlns:c="http://schemas.openxmlformats.org/drawingml/2006/chart" r:id="R54c12e4432944ce8"/>
           </a:graphicData>
         </a:graphic>
       </p:graphicFrame>
@@ -8864,8 +8884,8 @@
       <p:grpSpPr/>
       <p:sp>
         <p:nvSpPr>
-          <p:cNvPr id="10015" name="TextBox 1"/>
-          <p:cNvSpPr/>
+          <p:cNvPr id="100015" name="TextBox 1"/>
+          <p:cNvSpPr txBox="1"/>
           <p:nvPr/>
         </p:nvSpPr>
         <p:spPr>
@@ -8892,7 +8912,7 @@
       </p:sp>
       <p:graphicFrame>
         <p:nvGraphicFramePr>
-          <p:cNvPr id="10016" name="value"/>
+          <p:cNvPr id="100016" name="value"/>
           <p:cNvGraphicFramePr/>
           <p:nvPr/>
         </p:nvGraphicFramePr>
@@ -8902,13 +8922,13 @@
         </p:xfrm>
         <a:graphic xmlns:a="http://schemas.openxmlformats.org/drawingml/2006/main">
           <a:graphicData uri="http://schemas.openxmlformats.org/drawingml/2006/chart">
-            <c:chart xmlns:r="http://schemas.openxmlformats.org/officeDocument/2006/relationships" xmlns:c="http://schemas.openxmlformats.org/drawingml/2006/chart" r:id="R1fdde63634fd49cc"/>
+            <c:chart xmlns:r="http://schemas.openxmlformats.org/officeDocument/2006/relationships" xmlns:c="http://schemas.openxmlformats.org/drawingml/2006/chart" r:id="R340496a8d8f74a73"/>
           </a:graphicData>
         </a:graphic>
       </p:graphicFrame>
       <p:graphicFrame>
         <p:nvGraphicFramePr>
-          <p:cNvPr id="10017" name="value,category"/>
+          <p:cNvPr id="100017" name="value,category"/>
           <p:cNvGraphicFramePr/>
           <p:nvPr/>
         </p:nvGraphicFramePr>
@@ -8918,13 +8938,13 @@
         </p:xfrm>
         <a:graphic xmlns:a="http://schemas.openxmlformats.org/drawingml/2006/main">
           <a:graphicData uri="http://schemas.openxmlformats.org/drawingml/2006/chart">
-            <c:chart xmlns:r="http://schemas.openxmlformats.org/officeDocument/2006/relationships" xmlns:c="http://schemas.openxmlformats.org/drawingml/2006/chart" r:id="R0ff7a25c54a1467b"/>
+            <c:chart xmlns:r="http://schemas.openxmlformats.org/officeDocument/2006/relationships" xmlns:c="http://schemas.openxmlformats.org/drawingml/2006/chart" r:id="Reda2d7ea7068486f"/>
           </a:graphicData>
         </a:graphic>
       </p:graphicFrame>
       <p:graphicFrame>
         <p:nvGraphicFramePr>
-          <p:cNvPr id="10018" name="value @ outsideEnd"/>
+          <p:cNvPr id="100018" name="value @ outsideEnd"/>
           <p:cNvGraphicFramePr/>
           <p:nvPr/>
         </p:nvGraphicFramePr>
@@ -8934,13 +8954,13 @@
         </p:xfrm>
         <a:graphic xmlns:a="http://schemas.openxmlformats.org/drawingml/2006/main">
           <a:graphicData uri="http://schemas.openxmlformats.org/drawingml/2006/chart">
-            <c:chart xmlns:r="http://schemas.openxmlformats.org/officeDocument/2006/relationships" xmlns:c="http://schemas.openxmlformats.org/drawingml/2006/chart" r:id="Rde9d97721b9b47f9"/>
+            <c:chart xmlns:r="http://schemas.openxmlformats.org/officeDocument/2006/relationships" xmlns:c="http://schemas.openxmlformats.org/drawingml/2006/chart" r:id="R964cbabe9c934c21"/>
           </a:graphicData>
         </a:graphic>
       </p:graphicFrame>
       <p:graphicFrame>
         <p:nvGraphicFramePr>
-          <p:cNvPr id="10019" name="dataLabels=none"/>
+          <p:cNvPr id="100019" name="dataLabels=none"/>
           <p:cNvGraphicFramePr/>
           <p:nvPr/>
         </p:nvGraphicFramePr>
@@ -8950,7 +8970,7 @@
         </p:xfrm>
         <a:graphic xmlns:a="http://schemas.openxmlformats.org/drawingml/2006/main">
           <a:graphicData uri="http://schemas.openxmlformats.org/drawingml/2006/chart">
-            <c:chart xmlns:r="http://schemas.openxmlformats.org/officeDocument/2006/relationships" xmlns:c="http://schemas.openxmlformats.org/drawingml/2006/chart" r:id="Red182509e0914bc0"/>
+            <c:chart xmlns:r="http://schemas.openxmlformats.org/officeDocument/2006/relationships" xmlns:c="http://schemas.openxmlformats.org/drawingml/2006/chart" r:id="Rf5a8c42ac3414950"/>
           </a:graphicData>
         </a:graphic>
       </p:graphicFrame>
@@ -8971,8 +8991,8 @@
       <p:grpSpPr/>
       <p:sp>
         <p:nvSpPr>
-          <p:cNvPr id="10020" name="TextBox 1"/>
-          <p:cNvSpPr/>
+          <p:cNvPr id="100020" name="TextBox 1"/>
+          <p:cNvSpPr txBox="1"/>
           <p:nvPr/>
         </p:nvSpPr>
         <p:spPr>
@@ -8999,7 +9019,7 @@
       </p:sp>
       <p:graphicFrame>
         <p:nvGraphicFramePr>
-          <p:cNvPr id="10021" name="min/max + titles"/>
+          <p:cNvPr id="100021" name="min/max + titles"/>
           <p:cNvGraphicFramePr/>
           <p:nvPr/>
         </p:nvGraphicFramePr>
@@ -9009,13 +9029,13 @@
         </p:xfrm>
         <a:graphic xmlns:a="http://schemas.openxmlformats.org/drawingml/2006/main">
           <a:graphicData uri="http://schemas.openxmlformats.org/drawingml/2006/chart">
-            <c:chart xmlns:r="http://schemas.openxmlformats.org/officeDocument/2006/relationships" xmlns:c="http://schemas.openxmlformats.org/drawingml/2006/chart" r:id="Ra9efa324757a4e66"/>
+            <c:chart xmlns:r="http://schemas.openxmlformats.org/officeDocument/2006/relationships" xmlns:c="http://schemas.openxmlformats.org/drawingml/2006/chart" r:id="R68611bd764d0474d"/>
           </a:graphicData>
         </a:graphic>
       </p:graphicFrame>
       <p:graphicFrame>
         <p:nvGraphicFramePr>
-          <p:cNvPr id="10022" name="gridlines + minorGridlines"/>
+          <p:cNvPr id="100022" name="gridlines + minorGridlines"/>
           <p:cNvGraphicFramePr/>
           <p:nvPr/>
         </p:nvGraphicFramePr>
@@ -9025,13 +9045,13 @@
         </p:xfrm>
         <a:graphic xmlns:a="http://schemas.openxmlformats.org/drawingml/2006/main">
           <a:graphicData uri="http://schemas.openxmlformats.org/drawingml/2006/chart">
-            <c:chart xmlns:r="http://schemas.openxmlformats.org/officeDocument/2006/relationships" xmlns:c="http://schemas.openxmlformats.org/drawingml/2006/chart" r:id="Rdc300271680946ee"/>
+            <c:chart xmlns:r="http://schemas.openxmlformats.org/officeDocument/2006/relationships" xmlns:c="http://schemas.openxmlformats.org/drawingml/2006/chart" r:id="R2368966c07cb4cb8"/>
           </a:graphicData>
         </a:graphic>
       </p:graphicFrame>
       <p:graphicFrame>
         <p:nvGraphicFramePr>
-          <p:cNvPr id="10023" name="labelrotation=-30"/>
+          <p:cNvPr id="100023" name="labelrotation=-30"/>
           <p:cNvGraphicFramePr/>
           <p:nvPr/>
         </p:nvGraphicFramePr>
@@ -9041,13 +9061,13 @@
         </p:xfrm>
         <a:graphic xmlns:a="http://schemas.openxmlformats.org/drawingml/2006/main">
           <a:graphicData uri="http://schemas.openxmlformats.org/drawingml/2006/chart">
-            <c:chart xmlns:r="http://schemas.openxmlformats.org/officeDocument/2006/relationships" xmlns:c="http://schemas.openxmlformats.org/drawingml/2006/chart" r:id="Re3fe451e0e9c419d"/>
+            <c:chart xmlns:r="http://schemas.openxmlformats.org/officeDocument/2006/relationships" xmlns:c="http://schemas.openxmlformats.org/drawingml/2006/chart" r:id="R0ab51bb82ad04524"/>
           </a:graphicData>
         </a:graphic>
       </p:graphicFrame>
       <p:graphicFrame>
         <p:nvGraphicFramePr>
-          <p:cNvPr id="10024" name="dispunits=thousands"/>
+          <p:cNvPr id="100024" name="dispunits=thousands"/>
           <p:cNvGraphicFramePr/>
           <p:nvPr/>
         </p:nvGraphicFramePr>
@@ -9057,7 +9077,7 @@
         </p:xfrm>
         <a:graphic xmlns:a="http://schemas.openxmlformats.org/drawingml/2006/main">
           <a:graphicData uri="http://schemas.openxmlformats.org/drawingml/2006/chart">
-            <c:chart xmlns:r="http://schemas.openxmlformats.org/officeDocument/2006/relationships" xmlns:c="http://schemas.openxmlformats.org/drawingml/2006/chart" r:id="R29680927cdc24b12"/>
+            <c:chart xmlns:r="http://schemas.openxmlformats.org/officeDocument/2006/relationships" xmlns:c="http://schemas.openxmlformats.org/drawingml/2006/chart" r:id="R66c3671a715c4414"/>
           </a:graphicData>
         </a:graphic>
       </p:graphicFrame>
@@ -9078,8 +9098,8 @@
       <p:grpSpPr/>
       <p:sp>
         <p:nvSpPr>
-          <p:cNvPr id="10025" name="TextBox 1"/>
-          <p:cNvSpPr/>
+          <p:cNvPr id="100025" name="TextBox 1"/>
+          <p:cNvSpPr txBox="1"/>
           <p:nvPr/>
         </p:nvSpPr>
         <p:spPr>
@@ -9106,7 +9126,7 @@
       </p:sp>
       <p:graphicFrame>
         <p:nvGraphicFramePr>
-          <p:cNvPr id="10026" name="chartareafill + chartborder"/>
+          <p:cNvPr id="100026" name="chartareafill + chartborder"/>
           <p:cNvGraphicFramePr/>
           <p:nvPr/>
         </p:nvGraphicFramePr>
@@ -9116,13 +9136,13 @@
         </p:xfrm>
         <a:graphic xmlns:a="http://schemas.openxmlformats.org/drawingml/2006/main">
           <a:graphicData uri="http://schemas.openxmlformats.org/drawingml/2006/chart">
-            <c:chart xmlns:r="http://schemas.openxmlformats.org/officeDocument/2006/relationships" xmlns:c="http://schemas.openxmlformats.org/drawingml/2006/chart" r:id="R481d0b0e837b48f5"/>
+            <c:chart xmlns:r="http://schemas.openxmlformats.org/officeDocument/2006/relationships" xmlns:c="http://schemas.openxmlformats.org/drawingml/2006/chart" r:id="R1e067e600a264089"/>
           </a:graphicData>
         </a:graphic>
       </p:graphicFrame>
       <p:graphicFrame>
         <p:nvGraphicFramePr>
-          <p:cNvPr id="10027" name="roundedcorners=true"/>
+          <p:cNvPr id="100027" name="roundedcorners=true"/>
           <p:cNvGraphicFramePr/>
           <p:nvPr/>
         </p:nvGraphicFramePr>
@@ -9132,13 +9152,13 @@
         </p:xfrm>
         <a:graphic xmlns:a="http://schemas.openxmlformats.org/drawingml/2006/main">
           <a:graphicData uri="http://schemas.openxmlformats.org/drawingml/2006/chart">
-            <c:chart xmlns:r="http://schemas.openxmlformats.org/officeDocument/2006/relationships" xmlns:c="http://schemas.openxmlformats.org/drawingml/2006/chart" r:id="R8f5372b5a00347a3"/>
+            <c:chart xmlns:r="http://schemas.openxmlformats.org/officeDocument/2006/relationships" xmlns:c="http://schemas.openxmlformats.org/drawingml/2006/chart" r:id="R931d3f20a3c9411e"/>
           </a:graphicData>
         </a:graphic>
       </p:graphicFrame>
       <p:graphicFrame>
         <p:nvGraphicFramePr>
-          <p:cNvPr id="10028" name="plotFill=none"/>
+          <p:cNvPr id="100028" name="plotFill=none"/>
           <p:cNvGraphicFramePr/>
           <p:nvPr/>
         </p:nvGraphicFramePr>
@@ -9148,13 +9168,13 @@
         </p:xfrm>
         <a:graphic xmlns:a="http://schemas.openxmlformats.org/drawingml/2006/main">
           <a:graphicData uri="http://schemas.openxmlformats.org/drawingml/2006/chart">
-            <c:chart xmlns:r="http://schemas.openxmlformats.org/officeDocument/2006/relationships" xmlns:c="http://schemas.openxmlformats.org/drawingml/2006/chart" r:id="R0690154325924d5c"/>
+            <c:chart xmlns:r="http://schemas.openxmlformats.org/officeDocument/2006/relationships" xmlns:c="http://schemas.openxmlformats.org/drawingml/2006/chart" r:id="R7891a675b2ef4cdb"/>
           </a:graphicData>
         </a:graphic>
       </p:graphicFrame>
       <p:graphicFrame>
         <p:nvGraphicFramePr>
-          <p:cNvPr id="10029" name="chartareafill=none"/>
+          <p:cNvPr id="100029" name="chartareafill=none"/>
           <p:cNvGraphicFramePr/>
           <p:nvPr/>
         </p:nvGraphicFramePr>
@@ -9164,7 +9184,7 @@
         </p:xfrm>
         <a:graphic xmlns:a="http://schemas.openxmlformats.org/drawingml/2006/main">
           <a:graphicData uri="http://schemas.openxmlformats.org/drawingml/2006/chart">
-            <c:chart xmlns:r="http://schemas.openxmlformats.org/officeDocument/2006/relationships" xmlns:c="http://schemas.openxmlformats.org/drawingml/2006/chart" r:id="Rc3e1b30874b14eaf"/>
+            <c:chart xmlns:r="http://schemas.openxmlformats.org/officeDocument/2006/relationships" xmlns:c="http://schemas.openxmlformats.org/drawingml/2006/chart" r:id="R62c309b9d5434f60"/>
           </a:graphicData>
         </a:graphic>
       </p:graphicFrame>
@@ -9185,8 +9205,8 @@
       <p:grpSpPr/>
       <p:sp>
         <p:nvSpPr>
-          <p:cNvPr id="10030" name="TextBox 1"/>
-          <p:cNvSpPr/>
+          <p:cNvPr id="100030" name="TextBox 1"/>
+          <p:cNvSpPr txBox="1"/>
           <p:nvPr/>
         </p:nvSpPr>
         <p:spPr>
@@ -9213,7 +9233,7 @@
       </p:sp>
       <p:graphicFrame>
         <p:nvGraphicFramePr>
-          <p:cNvPr id="10031" name="FY24 P&amp;L Walk"/>
+          <p:cNvPr id="100031" name="FY24 P&amp;L Walk"/>
           <p:cNvGraphicFramePr/>
           <p:nvPr/>
         </p:nvGraphicFramePr>
@@ -9223,7 +9243,7 @@
         </p:xfrm>
         <a:graphic xmlns:a="http://schemas.openxmlformats.org/drawingml/2006/main">
           <a:graphicData uri="http://schemas.openxmlformats.org/drawingml/2006/chart">
-            <c:chart xmlns:r="http://schemas.openxmlformats.org/officeDocument/2006/relationships" xmlns:c="http://schemas.openxmlformats.org/drawingml/2006/chart" r:id="Rf8f7250aba644587"/>
+            <c:chart xmlns:r="http://schemas.openxmlformats.org/officeDocument/2006/relationships" xmlns:c="http://schemas.openxmlformats.org/drawingml/2006/chart" r:id="Ra7958169e2884a76"/>
           </a:graphicData>
         </a:graphic>
       </p:graphicFrame>
@@ -9244,8 +9264,8 @@
       <p:grpSpPr/>
       <p:sp>
         <p:nvSpPr>
-          <p:cNvPr id="10032" name="TextBox 1"/>
-          <p:cNvSpPr/>
+          <p:cNvPr id="100032" name="TextBox 1"/>
+          <p:cNvSpPr txBox="1"/>
           <p:nvPr/>
         </p:nvSpPr>
         <p:spPr>
@@ -9272,7 +9292,7 @@
       </p:sp>
       <p:graphicFrame>
         <p:nvGraphicFramePr>
-          <p:cNvPr id="10033" name="preset=minimal"/>
+          <p:cNvPr id="100033" name="preset=minimal"/>
           <p:cNvGraphicFramePr/>
           <p:nvPr/>
         </p:nvGraphicFramePr>
@@ -9282,13 +9302,13 @@
         </p:xfrm>
         <a:graphic xmlns:a="http://schemas.openxmlformats.org/drawingml/2006/main">
           <a:graphicData uri="http://schemas.openxmlformats.org/drawingml/2006/chart">
-            <c:chart xmlns:r="http://schemas.openxmlformats.org/officeDocument/2006/relationships" xmlns:c="http://schemas.openxmlformats.org/drawingml/2006/chart" r:id="Rbc44cc74429e4731"/>
+            <c:chart xmlns:r="http://schemas.openxmlformats.org/officeDocument/2006/relationships" xmlns:c="http://schemas.openxmlformats.org/drawingml/2006/chart" r:id="R4f1249e7076a4b09"/>
           </a:graphicData>
         </a:graphic>
       </p:graphicFrame>
       <p:graphicFrame>
         <p:nvGraphicFramePr>
-          <p:cNvPr id="10034" name="preset=dark"/>
+          <p:cNvPr id="100034" name="preset=dark"/>
           <p:cNvGraphicFramePr/>
           <p:nvPr/>
         </p:nvGraphicFramePr>
@@ -9298,13 +9318,13 @@
         </p:xfrm>
         <a:graphic xmlns:a="http://schemas.openxmlformats.org/drawingml/2006/main">
           <a:graphicData uri="http://schemas.openxmlformats.org/drawingml/2006/chart">
-            <c:chart xmlns:r="http://schemas.openxmlformats.org/officeDocument/2006/relationships" xmlns:c="http://schemas.openxmlformats.org/drawingml/2006/chart" r:id="Rcaaaee78dcb54beb"/>
+            <c:chart xmlns:r="http://schemas.openxmlformats.org/officeDocument/2006/relationships" xmlns:c="http://schemas.openxmlformats.org/drawingml/2006/chart" r:id="Rc7fd0a4060f54c80"/>
           </a:graphicData>
         </a:graphic>
       </p:graphicFrame>
       <p:graphicFrame>
         <p:nvGraphicFramePr>
-          <p:cNvPr id="10035" name="preset=corporate"/>
+          <p:cNvPr id="100035" name="preset=corporate"/>
           <p:cNvGraphicFramePr/>
           <p:nvPr/>
         </p:nvGraphicFramePr>
@@ -9314,13 +9334,13 @@
         </p:xfrm>
         <a:graphic xmlns:a="http://schemas.openxmlformats.org/drawingml/2006/main">
           <a:graphicData uri="http://schemas.openxmlformats.org/drawingml/2006/chart">
-            <c:chart xmlns:r="http://schemas.openxmlformats.org/officeDocument/2006/relationships" xmlns:c="http://schemas.openxmlformats.org/drawingml/2006/chart" r:id="R0fc493ff9d854bca"/>
+            <c:chart xmlns:r="http://schemas.openxmlformats.org/officeDocument/2006/relationships" xmlns:c="http://schemas.openxmlformats.org/drawingml/2006/chart" r:id="R37b8779614d4470b"/>
           </a:graphicData>
         </a:graphic>
       </p:graphicFrame>
       <p:graphicFrame>
         <p:nvGraphicFramePr>
-          <p:cNvPr id="10036" name="preset=colorful"/>
+          <p:cNvPr id="100036" name="preset=colorful"/>
           <p:cNvGraphicFramePr/>
           <p:nvPr/>
         </p:nvGraphicFramePr>
@@ -9330,7 +9350,7 @@
         </p:xfrm>
         <a:graphic xmlns:a="http://schemas.openxmlformats.org/drawingml/2006/main">
           <a:graphicData uri="http://schemas.openxmlformats.org/drawingml/2006/chart">
-            <c:chart xmlns:r="http://schemas.openxmlformats.org/officeDocument/2006/relationships" xmlns:c="http://schemas.openxmlformats.org/drawingml/2006/chart" r:id="R50ab0a5c7f8e44a5"/>
+            <c:chart xmlns:r="http://schemas.openxmlformats.org/officeDocument/2006/relationships" xmlns:c="http://schemas.openxmlformats.org/drawingml/2006/chart" r:id="R85f12468a9974802"/>
           </a:graphicData>
         </a:graphic>
       </p:graphicFrame>
